--- a/docs/pehero-product-tour.pptx
+++ b/docs/pehero-product-tour.pptx
@@ -5154,7 +5154,7 @@
                 </a:solidFill>
                 <a:latin typeface="Inter"/>
               </a:rPr>
-              <a:t>Demo dataset uses synthetic PE data.</a:t>
+              <a:t>BYOD — bring your own deal data.</a:t>
             </a:r>
           </a:p>
         </p:txBody>
